--- a/public/videos/repositories/smoking-area-where/smoking-area-where-tech-preview.pptx
+++ b/public/videos/repositories/smoking-area-where/smoking-area-where-tech-preview.pptx
@@ -134,7 +134,7 @@
           <p:cNvPr id="2" name="タイトル 1">
             <a:extLst>
               <a:ext uri="{FF2B5EF4-FFF2-40B4-BE49-F238E27FC236}">
-                <a16:creationId xmlns:a16="http://schemas.microsoft.com/office/drawing/2014/main" id="{D1607DD9-4452-156E-1919-CE9CD2CA5844}"/>
+                <a16:creationId xmlns:a16="http://schemas.microsoft.com/office/drawing/2014/main" id="{79105EBC-1F11-85E4-30AB-52AF8E134957}"/>
               </a:ext>
             </a:extLst>
           </p:cNvPr>
@@ -171,7 +171,7 @@
           <p:cNvPr id="3" name="字幕 2">
             <a:extLst>
               <a:ext uri="{FF2B5EF4-FFF2-40B4-BE49-F238E27FC236}">
-                <a16:creationId xmlns:a16="http://schemas.microsoft.com/office/drawing/2014/main" id="{AA68F676-E014-646B-6F1B-01A177DEFE44}"/>
+                <a16:creationId xmlns:a16="http://schemas.microsoft.com/office/drawing/2014/main" id="{25206F92-F188-797A-91EF-37C69CFDA1B4}"/>
               </a:ext>
             </a:extLst>
           </p:cNvPr>
@@ -241,7 +241,7 @@
           <p:cNvPr id="4" name="日付プレースホルダー 3">
             <a:extLst>
               <a:ext uri="{FF2B5EF4-FFF2-40B4-BE49-F238E27FC236}">
-                <a16:creationId xmlns:a16="http://schemas.microsoft.com/office/drawing/2014/main" id="{D56A8875-DE96-69D5-D917-983998DDD512}"/>
+                <a16:creationId xmlns:a16="http://schemas.microsoft.com/office/drawing/2014/main" id="{EDC9E59A-0DDA-2D4F-D156-CDD9DD778458}"/>
               </a:ext>
             </a:extLst>
           </p:cNvPr>
@@ -257,7 +257,7 @@
           <a:bodyPr/>
           <a:lstStyle/>
           <a:p>
-            <a:fld id="{3DFE9996-2F43-4DB5-9595-BA3FF82450D1}" type="datetimeFigureOut">
+            <a:fld id="{66A81F38-642B-4C52-A102-F6078277B884}" type="datetimeFigureOut">
               <a:rPr kumimoji="1" lang="ja-JP" altLang="en-US" smtClean="0"/>
               <a:t>2026/7/30</a:t>
             </a:fld>
@@ -270,7 +270,7 @@
           <p:cNvPr id="5" name="フッター プレースホルダー 4">
             <a:extLst>
               <a:ext uri="{FF2B5EF4-FFF2-40B4-BE49-F238E27FC236}">
-                <a16:creationId xmlns:a16="http://schemas.microsoft.com/office/drawing/2014/main" id="{AEF73584-8172-2B0D-200D-38521C4CC010}"/>
+                <a16:creationId xmlns:a16="http://schemas.microsoft.com/office/drawing/2014/main" id="{ED859C95-3416-F80F-BA83-E42B2D296263}"/>
               </a:ext>
             </a:extLst>
           </p:cNvPr>
@@ -295,7 +295,7 @@
           <p:cNvPr id="6" name="スライド番号プレースホルダー 5">
             <a:extLst>
               <a:ext uri="{FF2B5EF4-FFF2-40B4-BE49-F238E27FC236}">
-                <a16:creationId xmlns:a16="http://schemas.microsoft.com/office/drawing/2014/main" id="{53B84ACB-9CF7-5B81-A470-ADB559E4F264}"/>
+                <a16:creationId xmlns:a16="http://schemas.microsoft.com/office/drawing/2014/main" id="{3EEDE048-4511-71AC-794E-E3E084D828E0}"/>
               </a:ext>
             </a:extLst>
           </p:cNvPr>
@@ -311,7 +311,7 @@
           <a:bodyPr/>
           <a:lstStyle/>
           <a:p>
-            <a:fld id="{0B2EC772-2757-40B4-A5E9-D96527392856}" type="slidenum">
+            <a:fld id="{0A09F89C-9698-4AEB-AEA4-A8B3B450DEBE}" type="slidenum">
               <a:rPr kumimoji="1" lang="ja-JP" altLang="en-US" smtClean="0"/>
               <a:t>‹#›</a:t>
             </a:fld>
@@ -322,7 +322,7 @@
     </p:spTree>
     <p:extLst>
       <p:ext uri="{BB962C8B-B14F-4D97-AF65-F5344CB8AC3E}">
-        <p14:creationId xmlns:p14="http://schemas.microsoft.com/office/powerpoint/2010/main" val="1548925668"/>
+        <p14:creationId xmlns:p14="http://schemas.microsoft.com/office/powerpoint/2010/main" val="3037182180"/>
       </p:ext>
     </p:extLst>
   </p:cSld>
@@ -354,7 +354,7 @@
           <p:cNvPr id="2" name="タイトル 1">
             <a:extLst>
               <a:ext uri="{FF2B5EF4-FFF2-40B4-BE49-F238E27FC236}">
-                <a16:creationId xmlns:a16="http://schemas.microsoft.com/office/drawing/2014/main" id="{258A36F2-0617-6EFD-EBBE-FA670BA667EC}"/>
+                <a16:creationId xmlns:a16="http://schemas.microsoft.com/office/drawing/2014/main" id="{D531E8B1-623A-A657-525C-6D2A962FF782}"/>
               </a:ext>
             </a:extLst>
           </p:cNvPr>
@@ -382,7 +382,7 @@
           <p:cNvPr id="3" name="縦書きテキスト プレースホルダー 2">
             <a:extLst>
               <a:ext uri="{FF2B5EF4-FFF2-40B4-BE49-F238E27FC236}">
-                <a16:creationId xmlns:a16="http://schemas.microsoft.com/office/drawing/2014/main" id="{2CCFFE6D-B669-42C1-762A-365B0EDDA368}"/>
+                <a16:creationId xmlns:a16="http://schemas.microsoft.com/office/drawing/2014/main" id="{8049824F-DD6F-F24A-10AD-4C23C0E89FC2}"/>
               </a:ext>
             </a:extLst>
           </p:cNvPr>
@@ -471,7 +471,7 @@
           <p:cNvPr id="4" name="日付プレースホルダー 3">
             <a:extLst>
               <a:ext uri="{FF2B5EF4-FFF2-40B4-BE49-F238E27FC236}">
-                <a16:creationId xmlns:a16="http://schemas.microsoft.com/office/drawing/2014/main" id="{989DB6B0-CD0B-8301-C7C4-D5EC6911857B}"/>
+                <a16:creationId xmlns:a16="http://schemas.microsoft.com/office/drawing/2014/main" id="{EE4EE30B-4D9D-F451-D4EF-2DAB81083B5D}"/>
               </a:ext>
             </a:extLst>
           </p:cNvPr>
@@ -487,7 +487,7 @@
           <a:bodyPr/>
           <a:lstStyle/>
           <a:p>
-            <a:fld id="{3DFE9996-2F43-4DB5-9595-BA3FF82450D1}" type="datetimeFigureOut">
+            <a:fld id="{66A81F38-642B-4C52-A102-F6078277B884}" type="datetimeFigureOut">
               <a:rPr kumimoji="1" lang="ja-JP" altLang="en-US" smtClean="0"/>
               <a:t>2026/7/30</a:t>
             </a:fld>
@@ -500,7 +500,7 @@
           <p:cNvPr id="5" name="フッター プレースホルダー 4">
             <a:extLst>
               <a:ext uri="{FF2B5EF4-FFF2-40B4-BE49-F238E27FC236}">
-                <a16:creationId xmlns:a16="http://schemas.microsoft.com/office/drawing/2014/main" id="{21BF8871-43CA-3FFA-5EC2-B6D146362968}"/>
+                <a16:creationId xmlns:a16="http://schemas.microsoft.com/office/drawing/2014/main" id="{68BB6142-DD69-43C8-AFC3-256443260909}"/>
               </a:ext>
             </a:extLst>
           </p:cNvPr>
@@ -525,7 +525,7 @@
           <p:cNvPr id="6" name="スライド番号プレースホルダー 5">
             <a:extLst>
               <a:ext uri="{FF2B5EF4-FFF2-40B4-BE49-F238E27FC236}">
-                <a16:creationId xmlns:a16="http://schemas.microsoft.com/office/drawing/2014/main" id="{FE07288B-EEAD-06DB-B983-6A35C813AD36}"/>
+                <a16:creationId xmlns:a16="http://schemas.microsoft.com/office/drawing/2014/main" id="{EECD4E06-7A35-3876-3763-446EB0E94E37}"/>
               </a:ext>
             </a:extLst>
           </p:cNvPr>
@@ -541,7 +541,7 @@
           <a:bodyPr/>
           <a:lstStyle/>
           <a:p>
-            <a:fld id="{0B2EC772-2757-40B4-A5E9-D96527392856}" type="slidenum">
+            <a:fld id="{0A09F89C-9698-4AEB-AEA4-A8B3B450DEBE}" type="slidenum">
               <a:rPr kumimoji="1" lang="ja-JP" altLang="en-US" smtClean="0"/>
               <a:t>‹#›</a:t>
             </a:fld>
@@ -552,7 +552,7 @@
     </p:spTree>
     <p:extLst>
       <p:ext uri="{BB962C8B-B14F-4D97-AF65-F5344CB8AC3E}">
-        <p14:creationId xmlns:p14="http://schemas.microsoft.com/office/powerpoint/2010/main" val="3902353801"/>
+        <p14:creationId xmlns:p14="http://schemas.microsoft.com/office/powerpoint/2010/main" val="1502910409"/>
       </p:ext>
     </p:extLst>
   </p:cSld>
@@ -584,7 +584,7 @@
           <p:cNvPr id="2" name="縦書きタイトル 1">
             <a:extLst>
               <a:ext uri="{FF2B5EF4-FFF2-40B4-BE49-F238E27FC236}">
-                <a16:creationId xmlns:a16="http://schemas.microsoft.com/office/drawing/2014/main" id="{02045148-90CB-4696-38A8-43C0AAAFBF35}"/>
+                <a16:creationId xmlns:a16="http://schemas.microsoft.com/office/drawing/2014/main" id="{3B775011-808D-94C3-254A-11DE4CF664AE}"/>
               </a:ext>
             </a:extLst>
           </p:cNvPr>
@@ -617,7 +617,7 @@
           <p:cNvPr id="3" name="縦書きテキスト プレースホルダー 2">
             <a:extLst>
               <a:ext uri="{FF2B5EF4-FFF2-40B4-BE49-F238E27FC236}">
-                <a16:creationId xmlns:a16="http://schemas.microsoft.com/office/drawing/2014/main" id="{8BAE1420-3D28-7758-3196-260B5ADE4C86}"/>
+                <a16:creationId xmlns:a16="http://schemas.microsoft.com/office/drawing/2014/main" id="{181CF1B1-3B7C-EA2C-D55B-58D92C081084}"/>
               </a:ext>
             </a:extLst>
           </p:cNvPr>
@@ -711,7 +711,7 @@
           <p:cNvPr id="4" name="日付プレースホルダー 3">
             <a:extLst>
               <a:ext uri="{FF2B5EF4-FFF2-40B4-BE49-F238E27FC236}">
-                <a16:creationId xmlns:a16="http://schemas.microsoft.com/office/drawing/2014/main" id="{10B68B08-2027-B0AF-0137-5E80303551E4}"/>
+                <a16:creationId xmlns:a16="http://schemas.microsoft.com/office/drawing/2014/main" id="{17753D5D-052A-A792-5F02-3FA43E98B66E}"/>
               </a:ext>
             </a:extLst>
           </p:cNvPr>
@@ -727,7 +727,7 @@
           <a:bodyPr/>
           <a:lstStyle/>
           <a:p>
-            <a:fld id="{3DFE9996-2F43-4DB5-9595-BA3FF82450D1}" type="datetimeFigureOut">
+            <a:fld id="{66A81F38-642B-4C52-A102-F6078277B884}" type="datetimeFigureOut">
               <a:rPr kumimoji="1" lang="ja-JP" altLang="en-US" smtClean="0"/>
               <a:t>2026/7/30</a:t>
             </a:fld>
@@ -740,7 +740,7 @@
           <p:cNvPr id="5" name="フッター プレースホルダー 4">
             <a:extLst>
               <a:ext uri="{FF2B5EF4-FFF2-40B4-BE49-F238E27FC236}">
-                <a16:creationId xmlns:a16="http://schemas.microsoft.com/office/drawing/2014/main" id="{5E31FCFA-E811-A81B-2450-93A7BE816EB5}"/>
+                <a16:creationId xmlns:a16="http://schemas.microsoft.com/office/drawing/2014/main" id="{3C93DCED-0027-51B9-489C-864C684DD3B7}"/>
               </a:ext>
             </a:extLst>
           </p:cNvPr>
@@ -765,7 +765,7 @@
           <p:cNvPr id="6" name="スライド番号プレースホルダー 5">
             <a:extLst>
               <a:ext uri="{FF2B5EF4-FFF2-40B4-BE49-F238E27FC236}">
-                <a16:creationId xmlns:a16="http://schemas.microsoft.com/office/drawing/2014/main" id="{20A165EB-851A-83D0-E3F4-2824CDAE1452}"/>
+                <a16:creationId xmlns:a16="http://schemas.microsoft.com/office/drawing/2014/main" id="{18E3F896-FFD7-6EAC-A2F9-F9175DFC45BA}"/>
               </a:ext>
             </a:extLst>
           </p:cNvPr>
@@ -781,7 +781,7 @@
           <a:bodyPr/>
           <a:lstStyle/>
           <a:p>
-            <a:fld id="{0B2EC772-2757-40B4-A5E9-D96527392856}" type="slidenum">
+            <a:fld id="{0A09F89C-9698-4AEB-AEA4-A8B3B450DEBE}" type="slidenum">
               <a:rPr kumimoji="1" lang="ja-JP" altLang="en-US" smtClean="0"/>
               <a:t>‹#›</a:t>
             </a:fld>
@@ -792,7 +792,7 @@
     </p:spTree>
     <p:extLst>
       <p:ext uri="{BB962C8B-B14F-4D97-AF65-F5344CB8AC3E}">
-        <p14:creationId xmlns:p14="http://schemas.microsoft.com/office/powerpoint/2010/main" val="2905014043"/>
+        <p14:creationId xmlns:p14="http://schemas.microsoft.com/office/powerpoint/2010/main" val="4128602019"/>
       </p:ext>
     </p:extLst>
   </p:cSld>
@@ -824,7 +824,7 @@
           <p:cNvPr id="2" name="タイトル 1">
             <a:extLst>
               <a:ext uri="{FF2B5EF4-FFF2-40B4-BE49-F238E27FC236}">
-                <a16:creationId xmlns:a16="http://schemas.microsoft.com/office/drawing/2014/main" id="{662045DD-5832-7357-ED67-C5596900766D}"/>
+                <a16:creationId xmlns:a16="http://schemas.microsoft.com/office/drawing/2014/main" id="{38000832-46F9-E369-EC37-1CA7441AB2F2}"/>
               </a:ext>
             </a:extLst>
           </p:cNvPr>
@@ -852,7 +852,7 @@
           <p:cNvPr id="3" name="コンテンツ プレースホルダー 2">
             <a:extLst>
               <a:ext uri="{FF2B5EF4-FFF2-40B4-BE49-F238E27FC236}">
-                <a16:creationId xmlns:a16="http://schemas.microsoft.com/office/drawing/2014/main" id="{6B86A6FB-6FB4-FC06-277D-FC26C823720D}"/>
+                <a16:creationId xmlns:a16="http://schemas.microsoft.com/office/drawing/2014/main" id="{F5F008E0-70CE-43D7-54FD-3762F831CDCB}"/>
               </a:ext>
             </a:extLst>
           </p:cNvPr>
@@ -941,7 +941,7 @@
           <p:cNvPr id="4" name="日付プレースホルダー 3">
             <a:extLst>
               <a:ext uri="{FF2B5EF4-FFF2-40B4-BE49-F238E27FC236}">
-                <a16:creationId xmlns:a16="http://schemas.microsoft.com/office/drawing/2014/main" id="{EB43B290-7D22-D748-1D18-BA4AAA211998}"/>
+                <a16:creationId xmlns:a16="http://schemas.microsoft.com/office/drawing/2014/main" id="{EA8D4F0A-51B1-6CF2-5D4F-AEEC6754DE46}"/>
               </a:ext>
             </a:extLst>
           </p:cNvPr>
@@ -957,7 +957,7 @@
           <a:bodyPr/>
           <a:lstStyle/>
           <a:p>
-            <a:fld id="{3DFE9996-2F43-4DB5-9595-BA3FF82450D1}" type="datetimeFigureOut">
+            <a:fld id="{66A81F38-642B-4C52-A102-F6078277B884}" type="datetimeFigureOut">
               <a:rPr kumimoji="1" lang="ja-JP" altLang="en-US" smtClean="0"/>
               <a:t>2026/7/30</a:t>
             </a:fld>
@@ -970,7 +970,7 @@
           <p:cNvPr id="5" name="フッター プレースホルダー 4">
             <a:extLst>
               <a:ext uri="{FF2B5EF4-FFF2-40B4-BE49-F238E27FC236}">
-                <a16:creationId xmlns:a16="http://schemas.microsoft.com/office/drawing/2014/main" id="{764353D4-043E-D742-87E7-1022F3DB476B}"/>
+                <a16:creationId xmlns:a16="http://schemas.microsoft.com/office/drawing/2014/main" id="{328736A9-6743-6CE9-AE23-2BB942502012}"/>
               </a:ext>
             </a:extLst>
           </p:cNvPr>
@@ -995,7 +995,7 @@
           <p:cNvPr id="6" name="スライド番号プレースホルダー 5">
             <a:extLst>
               <a:ext uri="{FF2B5EF4-FFF2-40B4-BE49-F238E27FC236}">
-                <a16:creationId xmlns:a16="http://schemas.microsoft.com/office/drawing/2014/main" id="{263EE95F-9A7E-4608-1FD6-59A5CA3DAE84}"/>
+                <a16:creationId xmlns:a16="http://schemas.microsoft.com/office/drawing/2014/main" id="{7C5DE06D-5EE7-E53F-4466-A969FB1CF6A9}"/>
               </a:ext>
             </a:extLst>
           </p:cNvPr>
@@ -1011,7 +1011,7 @@
           <a:bodyPr/>
           <a:lstStyle/>
           <a:p>
-            <a:fld id="{0B2EC772-2757-40B4-A5E9-D96527392856}" type="slidenum">
+            <a:fld id="{0A09F89C-9698-4AEB-AEA4-A8B3B450DEBE}" type="slidenum">
               <a:rPr kumimoji="1" lang="ja-JP" altLang="en-US" smtClean="0"/>
               <a:t>‹#›</a:t>
             </a:fld>
@@ -1022,7 +1022,7 @@
     </p:spTree>
     <p:extLst>
       <p:ext uri="{BB962C8B-B14F-4D97-AF65-F5344CB8AC3E}">
-        <p14:creationId xmlns:p14="http://schemas.microsoft.com/office/powerpoint/2010/main" val="689934842"/>
+        <p14:creationId xmlns:p14="http://schemas.microsoft.com/office/powerpoint/2010/main" val="1811355348"/>
       </p:ext>
     </p:extLst>
   </p:cSld>
@@ -1054,7 +1054,7 @@
           <p:cNvPr id="2" name="タイトル 1">
             <a:extLst>
               <a:ext uri="{FF2B5EF4-FFF2-40B4-BE49-F238E27FC236}">
-                <a16:creationId xmlns:a16="http://schemas.microsoft.com/office/drawing/2014/main" id="{7B7ED1F5-AE39-BA66-8A21-B3B88C1F2C35}"/>
+                <a16:creationId xmlns:a16="http://schemas.microsoft.com/office/drawing/2014/main" id="{BE4BBC0B-24F7-3F8A-A75C-0622F355758F}"/>
               </a:ext>
             </a:extLst>
           </p:cNvPr>
@@ -1091,7 +1091,7 @@
           <p:cNvPr id="3" name="テキスト プレースホルダー 2">
             <a:extLst>
               <a:ext uri="{FF2B5EF4-FFF2-40B4-BE49-F238E27FC236}">
-                <a16:creationId xmlns:a16="http://schemas.microsoft.com/office/drawing/2014/main" id="{64CBB4F2-51B9-93D9-5054-D2C2994F0EF6}"/>
+                <a16:creationId xmlns:a16="http://schemas.microsoft.com/office/drawing/2014/main" id="{87F6B11F-58DE-99C8-4420-113253DF6C15}"/>
               </a:ext>
             </a:extLst>
           </p:cNvPr>
@@ -1216,7 +1216,7 @@
           <p:cNvPr id="4" name="日付プレースホルダー 3">
             <a:extLst>
               <a:ext uri="{FF2B5EF4-FFF2-40B4-BE49-F238E27FC236}">
-                <a16:creationId xmlns:a16="http://schemas.microsoft.com/office/drawing/2014/main" id="{A9746E14-D28A-CCDA-78E7-F59907FFA201}"/>
+                <a16:creationId xmlns:a16="http://schemas.microsoft.com/office/drawing/2014/main" id="{73476A09-05D5-245B-CB4C-8DD15835D8FD}"/>
               </a:ext>
             </a:extLst>
           </p:cNvPr>
@@ -1232,7 +1232,7 @@
           <a:bodyPr/>
           <a:lstStyle/>
           <a:p>
-            <a:fld id="{3DFE9996-2F43-4DB5-9595-BA3FF82450D1}" type="datetimeFigureOut">
+            <a:fld id="{66A81F38-642B-4C52-A102-F6078277B884}" type="datetimeFigureOut">
               <a:rPr kumimoji="1" lang="ja-JP" altLang="en-US" smtClean="0"/>
               <a:t>2026/7/30</a:t>
             </a:fld>
@@ -1245,7 +1245,7 @@
           <p:cNvPr id="5" name="フッター プレースホルダー 4">
             <a:extLst>
               <a:ext uri="{FF2B5EF4-FFF2-40B4-BE49-F238E27FC236}">
-                <a16:creationId xmlns:a16="http://schemas.microsoft.com/office/drawing/2014/main" id="{0C0D8B96-E99F-12B5-ED00-0FB315AAB054}"/>
+                <a16:creationId xmlns:a16="http://schemas.microsoft.com/office/drawing/2014/main" id="{54A189A9-65D9-3635-FE75-E065726FA4D9}"/>
               </a:ext>
             </a:extLst>
           </p:cNvPr>
@@ -1270,7 +1270,7 @@
           <p:cNvPr id="6" name="スライド番号プレースホルダー 5">
             <a:extLst>
               <a:ext uri="{FF2B5EF4-FFF2-40B4-BE49-F238E27FC236}">
-                <a16:creationId xmlns:a16="http://schemas.microsoft.com/office/drawing/2014/main" id="{350B5636-E0F5-E5BD-6575-1522A528D1BB}"/>
+                <a16:creationId xmlns:a16="http://schemas.microsoft.com/office/drawing/2014/main" id="{19C84B83-50BD-153A-1465-6C00D16A7ABD}"/>
               </a:ext>
             </a:extLst>
           </p:cNvPr>
@@ -1286,7 +1286,7 @@
           <a:bodyPr/>
           <a:lstStyle/>
           <a:p>
-            <a:fld id="{0B2EC772-2757-40B4-A5E9-D96527392856}" type="slidenum">
+            <a:fld id="{0A09F89C-9698-4AEB-AEA4-A8B3B450DEBE}" type="slidenum">
               <a:rPr kumimoji="1" lang="ja-JP" altLang="en-US" smtClean="0"/>
               <a:t>‹#›</a:t>
             </a:fld>
@@ -1297,7 +1297,7 @@
     </p:spTree>
     <p:extLst>
       <p:ext uri="{BB962C8B-B14F-4D97-AF65-F5344CB8AC3E}">
-        <p14:creationId xmlns:p14="http://schemas.microsoft.com/office/powerpoint/2010/main" val="1974542562"/>
+        <p14:creationId xmlns:p14="http://schemas.microsoft.com/office/powerpoint/2010/main" val="3181294843"/>
       </p:ext>
     </p:extLst>
   </p:cSld>
@@ -1329,7 +1329,7 @@
           <p:cNvPr id="2" name="タイトル 1">
             <a:extLst>
               <a:ext uri="{FF2B5EF4-FFF2-40B4-BE49-F238E27FC236}">
-                <a16:creationId xmlns:a16="http://schemas.microsoft.com/office/drawing/2014/main" id="{C92D2A18-B5E4-FC68-FF9D-06FA39689A12}"/>
+                <a16:creationId xmlns:a16="http://schemas.microsoft.com/office/drawing/2014/main" id="{A8664D47-10CF-A1B0-BC03-3EF7E1121F4F}"/>
               </a:ext>
             </a:extLst>
           </p:cNvPr>
@@ -1357,7 +1357,7 @@
           <p:cNvPr id="3" name="コンテンツ プレースホルダー 2">
             <a:extLst>
               <a:ext uri="{FF2B5EF4-FFF2-40B4-BE49-F238E27FC236}">
-                <a16:creationId xmlns:a16="http://schemas.microsoft.com/office/drawing/2014/main" id="{4AAA3ABD-CB59-0D28-43B7-C536E536FB0E}"/>
+                <a16:creationId xmlns:a16="http://schemas.microsoft.com/office/drawing/2014/main" id="{ABD6FE07-DCB0-9CBC-9963-A655292B58E9}"/>
               </a:ext>
             </a:extLst>
           </p:cNvPr>
@@ -1451,7 +1451,7 @@
           <p:cNvPr id="4" name="コンテンツ プレースホルダー 3">
             <a:extLst>
               <a:ext uri="{FF2B5EF4-FFF2-40B4-BE49-F238E27FC236}">
-                <a16:creationId xmlns:a16="http://schemas.microsoft.com/office/drawing/2014/main" id="{59F49378-F9F6-DEC5-6555-EDD794B05260}"/>
+                <a16:creationId xmlns:a16="http://schemas.microsoft.com/office/drawing/2014/main" id="{5712EBAF-44F8-138D-9B0D-789F80E9456E}"/>
               </a:ext>
             </a:extLst>
           </p:cNvPr>
@@ -1545,7 +1545,7 @@
           <p:cNvPr id="5" name="日付プレースホルダー 4">
             <a:extLst>
               <a:ext uri="{FF2B5EF4-FFF2-40B4-BE49-F238E27FC236}">
-                <a16:creationId xmlns:a16="http://schemas.microsoft.com/office/drawing/2014/main" id="{3AC88619-D76A-ADC0-2F11-626E5E6FB2C0}"/>
+                <a16:creationId xmlns:a16="http://schemas.microsoft.com/office/drawing/2014/main" id="{9197C514-2542-E07E-FE13-2DCD67FBBDF5}"/>
               </a:ext>
             </a:extLst>
           </p:cNvPr>
@@ -1561,7 +1561,7 @@
           <a:bodyPr/>
           <a:lstStyle/>
           <a:p>
-            <a:fld id="{3DFE9996-2F43-4DB5-9595-BA3FF82450D1}" type="datetimeFigureOut">
+            <a:fld id="{66A81F38-642B-4C52-A102-F6078277B884}" type="datetimeFigureOut">
               <a:rPr kumimoji="1" lang="ja-JP" altLang="en-US" smtClean="0"/>
               <a:t>2026/7/30</a:t>
             </a:fld>
@@ -1574,7 +1574,7 @@
           <p:cNvPr id="6" name="フッター プレースホルダー 5">
             <a:extLst>
               <a:ext uri="{FF2B5EF4-FFF2-40B4-BE49-F238E27FC236}">
-                <a16:creationId xmlns:a16="http://schemas.microsoft.com/office/drawing/2014/main" id="{3A2BC279-6110-A0AD-6EA8-A420D39A2A3C}"/>
+                <a16:creationId xmlns:a16="http://schemas.microsoft.com/office/drawing/2014/main" id="{C3D22F24-F57A-CD39-FAFF-F6C3D1542BFC}"/>
               </a:ext>
             </a:extLst>
           </p:cNvPr>
@@ -1599,7 +1599,7 @@
           <p:cNvPr id="7" name="スライド番号プレースホルダー 6">
             <a:extLst>
               <a:ext uri="{FF2B5EF4-FFF2-40B4-BE49-F238E27FC236}">
-                <a16:creationId xmlns:a16="http://schemas.microsoft.com/office/drawing/2014/main" id="{256FF12A-E874-EB43-2F36-F91245939B1F}"/>
+                <a16:creationId xmlns:a16="http://schemas.microsoft.com/office/drawing/2014/main" id="{7553EA2C-584D-7E9D-9F50-A2697F9571E3}"/>
               </a:ext>
             </a:extLst>
           </p:cNvPr>
@@ -1615,7 +1615,7 @@
           <a:bodyPr/>
           <a:lstStyle/>
           <a:p>
-            <a:fld id="{0B2EC772-2757-40B4-A5E9-D96527392856}" type="slidenum">
+            <a:fld id="{0A09F89C-9698-4AEB-AEA4-A8B3B450DEBE}" type="slidenum">
               <a:rPr kumimoji="1" lang="ja-JP" altLang="en-US" smtClean="0"/>
               <a:t>‹#›</a:t>
             </a:fld>
@@ -1626,7 +1626,7 @@
     </p:spTree>
     <p:extLst>
       <p:ext uri="{BB962C8B-B14F-4D97-AF65-F5344CB8AC3E}">
-        <p14:creationId xmlns:p14="http://schemas.microsoft.com/office/powerpoint/2010/main" val="3083533081"/>
+        <p14:creationId xmlns:p14="http://schemas.microsoft.com/office/powerpoint/2010/main" val="2551666613"/>
       </p:ext>
     </p:extLst>
   </p:cSld>
@@ -1658,7 +1658,7 @@
           <p:cNvPr id="2" name="タイトル 1">
             <a:extLst>
               <a:ext uri="{FF2B5EF4-FFF2-40B4-BE49-F238E27FC236}">
-                <a16:creationId xmlns:a16="http://schemas.microsoft.com/office/drawing/2014/main" id="{3003F874-E144-2BDB-FB9C-7FBB8D1BCE7D}"/>
+                <a16:creationId xmlns:a16="http://schemas.microsoft.com/office/drawing/2014/main" id="{6A193EE5-3366-3AA0-9912-A66446E9C2DB}"/>
               </a:ext>
             </a:extLst>
           </p:cNvPr>
@@ -1691,7 +1691,7 @@
           <p:cNvPr id="3" name="テキスト プレースホルダー 2">
             <a:extLst>
               <a:ext uri="{FF2B5EF4-FFF2-40B4-BE49-F238E27FC236}">
-                <a16:creationId xmlns:a16="http://schemas.microsoft.com/office/drawing/2014/main" id="{DF1FDE8D-4B75-4822-DAA8-8B2D65A7156C}"/>
+                <a16:creationId xmlns:a16="http://schemas.microsoft.com/office/drawing/2014/main" id="{089CB310-4645-FE3A-4BA7-2D0946128337}"/>
               </a:ext>
             </a:extLst>
           </p:cNvPr>
@@ -1762,7 +1762,7 @@
           <p:cNvPr id="4" name="コンテンツ プレースホルダー 3">
             <a:extLst>
               <a:ext uri="{FF2B5EF4-FFF2-40B4-BE49-F238E27FC236}">
-                <a16:creationId xmlns:a16="http://schemas.microsoft.com/office/drawing/2014/main" id="{6DF1062A-C0CF-0438-920F-F02A794210CF}"/>
+                <a16:creationId xmlns:a16="http://schemas.microsoft.com/office/drawing/2014/main" id="{7E6AC706-79F2-96D0-133C-7024A02E0F09}"/>
               </a:ext>
             </a:extLst>
           </p:cNvPr>
@@ -1856,7 +1856,7 @@
           <p:cNvPr id="5" name="テキスト プレースホルダー 4">
             <a:extLst>
               <a:ext uri="{FF2B5EF4-FFF2-40B4-BE49-F238E27FC236}">
-                <a16:creationId xmlns:a16="http://schemas.microsoft.com/office/drawing/2014/main" id="{D3B9BC24-FD46-C63C-D0FF-C471DDE282DF}"/>
+                <a16:creationId xmlns:a16="http://schemas.microsoft.com/office/drawing/2014/main" id="{DF90F89E-453D-CB89-D508-9245985806E7}"/>
               </a:ext>
             </a:extLst>
           </p:cNvPr>
@@ -1927,7 +1927,7 @@
           <p:cNvPr id="6" name="コンテンツ プレースホルダー 5">
             <a:extLst>
               <a:ext uri="{FF2B5EF4-FFF2-40B4-BE49-F238E27FC236}">
-                <a16:creationId xmlns:a16="http://schemas.microsoft.com/office/drawing/2014/main" id="{CA9A27DD-6E03-11BE-E125-44B154B17D6C}"/>
+                <a16:creationId xmlns:a16="http://schemas.microsoft.com/office/drawing/2014/main" id="{9A5F0965-266C-1CAA-B5E8-ED1C992128DB}"/>
               </a:ext>
             </a:extLst>
           </p:cNvPr>
@@ -2021,7 +2021,7 @@
           <p:cNvPr id="7" name="日付プレースホルダー 6">
             <a:extLst>
               <a:ext uri="{FF2B5EF4-FFF2-40B4-BE49-F238E27FC236}">
-                <a16:creationId xmlns:a16="http://schemas.microsoft.com/office/drawing/2014/main" id="{14CCB800-7100-D5EF-62FE-87F09826FC19}"/>
+                <a16:creationId xmlns:a16="http://schemas.microsoft.com/office/drawing/2014/main" id="{84A3EAC9-D81B-BE65-8075-1CAAF29F62B5}"/>
               </a:ext>
             </a:extLst>
           </p:cNvPr>
@@ -2037,7 +2037,7 @@
           <a:bodyPr/>
           <a:lstStyle/>
           <a:p>
-            <a:fld id="{3DFE9996-2F43-4DB5-9595-BA3FF82450D1}" type="datetimeFigureOut">
+            <a:fld id="{66A81F38-642B-4C52-A102-F6078277B884}" type="datetimeFigureOut">
               <a:rPr kumimoji="1" lang="ja-JP" altLang="en-US" smtClean="0"/>
               <a:t>2026/7/30</a:t>
             </a:fld>
@@ -2050,7 +2050,7 @@
           <p:cNvPr id="8" name="フッター プレースホルダー 7">
             <a:extLst>
               <a:ext uri="{FF2B5EF4-FFF2-40B4-BE49-F238E27FC236}">
-                <a16:creationId xmlns:a16="http://schemas.microsoft.com/office/drawing/2014/main" id="{06A7F90C-28B5-7D91-B27D-10C1C64C1299}"/>
+                <a16:creationId xmlns:a16="http://schemas.microsoft.com/office/drawing/2014/main" id="{DA3951A0-1EA5-4B41-EC39-163522985F89}"/>
               </a:ext>
             </a:extLst>
           </p:cNvPr>
@@ -2075,7 +2075,7 @@
           <p:cNvPr id="9" name="スライド番号プレースホルダー 8">
             <a:extLst>
               <a:ext uri="{FF2B5EF4-FFF2-40B4-BE49-F238E27FC236}">
-                <a16:creationId xmlns:a16="http://schemas.microsoft.com/office/drawing/2014/main" id="{ECC95182-6280-C983-2AAE-B8194C2F2222}"/>
+                <a16:creationId xmlns:a16="http://schemas.microsoft.com/office/drawing/2014/main" id="{78285D7F-5E02-61B7-CD43-173A6A213E30}"/>
               </a:ext>
             </a:extLst>
           </p:cNvPr>
@@ -2091,7 +2091,7 @@
           <a:bodyPr/>
           <a:lstStyle/>
           <a:p>
-            <a:fld id="{0B2EC772-2757-40B4-A5E9-D96527392856}" type="slidenum">
+            <a:fld id="{0A09F89C-9698-4AEB-AEA4-A8B3B450DEBE}" type="slidenum">
               <a:rPr kumimoji="1" lang="ja-JP" altLang="en-US" smtClean="0"/>
               <a:t>‹#›</a:t>
             </a:fld>
@@ -2102,7 +2102,7 @@
     </p:spTree>
     <p:extLst>
       <p:ext uri="{BB962C8B-B14F-4D97-AF65-F5344CB8AC3E}">
-        <p14:creationId xmlns:p14="http://schemas.microsoft.com/office/powerpoint/2010/main" val="2601138116"/>
+        <p14:creationId xmlns:p14="http://schemas.microsoft.com/office/powerpoint/2010/main" val="1724513359"/>
       </p:ext>
     </p:extLst>
   </p:cSld>
@@ -2134,7 +2134,7 @@
           <p:cNvPr id="2" name="タイトル 1">
             <a:extLst>
               <a:ext uri="{FF2B5EF4-FFF2-40B4-BE49-F238E27FC236}">
-                <a16:creationId xmlns:a16="http://schemas.microsoft.com/office/drawing/2014/main" id="{9C5EDD2C-A69D-8B99-EFF9-E6D673989D6D}"/>
+                <a16:creationId xmlns:a16="http://schemas.microsoft.com/office/drawing/2014/main" id="{19C348E4-53A1-4889-FE4F-4BDB71359C8C}"/>
               </a:ext>
             </a:extLst>
           </p:cNvPr>
@@ -2162,7 +2162,7 @@
           <p:cNvPr id="3" name="日付プレースホルダー 2">
             <a:extLst>
               <a:ext uri="{FF2B5EF4-FFF2-40B4-BE49-F238E27FC236}">
-                <a16:creationId xmlns:a16="http://schemas.microsoft.com/office/drawing/2014/main" id="{764C29C3-BFFE-82F8-47F3-20FFE5D16E33}"/>
+                <a16:creationId xmlns:a16="http://schemas.microsoft.com/office/drawing/2014/main" id="{D9F49D08-02C9-5B31-85FC-92907455659C}"/>
               </a:ext>
             </a:extLst>
           </p:cNvPr>
@@ -2178,7 +2178,7 @@
           <a:bodyPr/>
           <a:lstStyle/>
           <a:p>
-            <a:fld id="{3DFE9996-2F43-4DB5-9595-BA3FF82450D1}" type="datetimeFigureOut">
+            <a:fld id="{66A81F38-642B-4C52-A102-F6078277B884}" type="datetimeFigureOut">
               <a:rPr kumimoji="1" lang="ja-JP" altLang="en-US" smtClean="0"/>
               <a:t>2026/7/30</a:t>
             </a:fld>
@@ -2191,7 +2191,7 @@
           <p:cNvPr id="4" name="フッター プレースホルダー 3">
             <a:extLst>
               <a:ext uri="{FF2B5EF4-FFF2-40B4-BE49-F238E27FC236}">
-                <a16:creationId xmlns:a16="http://schemas.microsoft.com/office/drawing/2014/main" id="{FC702333-5CA4-49FD-43C7-BB3D7BE9267A}"/>
+                <a16:creationId xmlns:a16="http://schemas.microsoft.com/office/drawing/2014/main" id="{6F5305C0-5ABB-0A3A-A946-844A6FA14C0A}"/>
               </a:ext>
             </a:extLst>
           </p:cNvPr>
@@ -2216,7 +2216,7 @@
           <p:cNvPr id="5" name="スライド番号プレースホルダー 4">
             <a:extLst>
               <a:ext uri="{FF2B5EF4-FFF2-40B4-BE49-F238E27FC236}">
-                <a16:creationId xmlns:a16="http://schemas.microsoft.com/office/drawing/2014/main" id="{B91756D6-FD70-5C3D-C5F2-FF4C74BF0814}"/>
+                <a16:creationId xmlns:a16="http://schemas.microsoft.com/office/drawing/2014/main" id="{8401DC09-FE13-8B2F-DF38-F295ADF46933}"/>
               </a:ext>
             </a:extLst>
           </p:cNvPr>
@@ -2232,7 +2232,7 @@
           <a:bodyPr/>
           <a:lstStyle/>
           <a:p>
-            <a:fld id="{0B2EC772-2757-40B4-A5E9-D96527392856}" type="slidenum">
+            <a:fld id="{0A09F89C-9698-4AEB-AEA4-A8B3B450DEBE}" type="slidenum">
               <a:rPr kumimoji="1" lang="ja-JP" altLang="en-US" smtClean="0"/>
               <a:t>‹#›</a:t>
             </a:fld>
@@ -2243,7 +2243,7 @@
     </p:spTree>
     <p:extLst>
       <p:ext uri="{BB962C8B-B14F-4D97-AF65-F5344CB8AC3E}">
-        <p14:creationId xmlns:p14="http://schemas.microsoft.com/office/powerpoint/2010/main" val="1441089134"/>
+        <p14:creationId xmlns:p14="http://schemas.microsoft.com/office/powerpoint/2010/main" val="3795101166"/>
       </p:ext>
     </p:extLst>
   </p:cSld>
@@ -2275,7 +2275,7 @@
           <p:cNvPr id="2" name="日付プレースホルダー 1">
             <a:extLst>
               <a:ext uri="{FF2B5EF4-FFF2-40B4-BE49-F238E27FC236}">
-                <a16:creationId xmlns:a16="http://schemas.microsoft.com/office/drawing/2014/main" id="{CA3F0E60-F1FF-7842-BDBB-371213F26B97}"/>
+                <a16:creationId xmlns:a16="http://schemas.microsoft.com/office/drawing/2014/main" id="{6D276005-A7CD-5386-6E5C-9AF15263A59D}"/>
               </a:ext>
             </a:extLst>
           </p:cNvPr>
@@ -2291,7 +2291,7 @@
           <a:bodyPr/>
           <a:lstStyle/>
           <a:p>
-            <a:fld id="{3DFE9996-2F43-4DB5-9595-BA3FF82450D1}" type="datetimeFigureOut">
+            <a:fld id="{66A81F38-642B-4C52-A102-F6078277B884}" type="datetimeFigureOut">
               <a:rPr kumimoji="1" lang="ja-JP" altLang="en-US" smtClean="0"/>
               <a:t>2026/7/30</a:t>
             </a:fld>
@@ -2304,7 +2304,7 @@
           <p:cNvPr id="3" name="フッター プレースホルダー 2">
             <a:extLst>
               <a:ext uri="{FF2B5EF4-FFF2-40B4-BE49-F238E27FC236}">
-                <a16:creationId xmlns:a16="http://schemas.microsoft.com/office/drawing/2014/main" id="{117069F3-23EE-7F9D-16D3-08095A410069}"/>
+                <a16:creationId xmlns:a16="http://schemas.microsoft.com/office/drawing/2014/main" id="{A03E5C2E-90C4-BBBC-9413-A4BEEC5A273B}"/>
               </a:ext>
             </a:extLst>
           </p:cNvPr>
@@ -2329,7 +2329,7 @@
           <p:cNvPr id="4" name="スライド番号プレースホルダー 3">
             <a:extLst>
               <a:ext uri="{FF2B5EF4-FFF2-40B4-BE49-F238E27FC236}">
-                <a16:creationId xmlns:a16="http://schemas.microsoft.com/office/drawing/2014/main" id="{A53E6F61-E117-471D-940B-0ADB3866AAE0}"/>
+                <a16:creationId xmlns:a16="http://schemas.microsoft.com/office/drawing/2014/main" id="{587E8AFE-2249-D3EC-56E8-CECFF70FDE4F}"/>
               </a:ext>
             </a:extLst>
           </p:cNvPr>
@@ -2345,7 +2345,7 @@
           <a:bodyPr/>
           <a:lstStyle/>
           <a:p>
-            <a:fld id="{0B2EC772-2757-40B4-A5E9-D96527392856}" type="slidenum">
+            <a:fld id="{0A09F89C-9698-4AEB-AEA4-A8B3B450DEBE}" type="slidenum">
               <a:rPr kumimoji="1" lang="ja-JP" altLang="en-US" smtClean="0"/>
               <a:t>‹#›</a:t>
             </a:fld>
@@ -2356,7 +2356,7 @@
     </p:spTree>
     <p:extLst>
       <p:ext uri="{BB962C8B-B14F-4D97-AF65-F5344CB8AC3E}">
-        <p14:creationId xmlns:p14="http://schemas.microsoft.com/office/powerpoint/2010/main" val="1875643464"/>
+        <p14:creationId xmlns:p14="http://schemas.microsoft.com/office/powerpoint/2010/main" val="1668126152"/>
       </p:ext>
     </p:extLst>
   </p:cSld>
@@ -2388,7 +2388,7 @@
           <p:cNvPr id="2" name="タイトル 1">
             <a:extLst>
               <a:ext uri="{FF2B5EF4-FFF2-40B4-BE49-F238E27FC236}">
-                <a16:creationId xmlns:a16="http://schemas.microsoft.com/office/drawing/2014/main" id="{86DF3729-861F-C0F3-52A6-3396BAD3F48B}"/>
+                <a16:creationId xmlns:a16="http://schemas.microsoft.com/office/drawing/2014/main" id="{A4E6403E-3A97-F119-D304-351F944FD027}"/>
               </a:ext>
             </a:extLst>
           </p:cNvPr>
@@ -2425,7 +2425,7 @@
           <p:cNvPr id="3" name="コンテンツ プレースホルダー 2">
             <a:extLst>
               <a:ext uri="{FF2B5EF4-FFF2-40B4-BE49-F238E27FC236}">
-                <a16:creationId xmlns:a16="http://schemas.microsoft.com/office/drawing/2014/main" id="{8007E5CE-DA29-11F9-A1B8-81545115D0D1}"/>
+                <a16:creationId xmlns:a16="http://schemas.microsoft.com/office/drawing/2014/main" id="{DE53988B-922E-3A14-13A8-E9EE86FE7060}"/>
               </a:ext>
             </a:extLst>
           </p:cNvPr>
@@ -2547,7 +2547,7 @@
           <p:cNvPr id="4" name="テキスト プレースホルダー 3">
             <a:extLst>
               <a:ext uri="{FF2B5EF4-FFF2-40B4-BE49-F238E27FC236}">
-                <a16:creationId xmlns:a16="http://schemas.microsoft.com/office/drawing/2014/main" id="{9159853F-DB32-76B0-A431-8B04748D89C9}"/>
+                <a16:creationId xmlns:a16="http://schemas.microsoft.com/office/drawing/2014/main" id="{DE116C24-A7B3-5965-06C5-9D72E1289D5F}"/>
               </a:ext>
             </a:extLst>
           </p:cNvPr>
@@ -2618,7 +2618,7 @@
           <p:cNvPr id="5" name="日付プレースホルダー 4">
             <a:extLst>
               <a:ext uri="{FF2B5EF4-FFF2-40B4-BE49-F238E27FC236}">
-                <a16:creationId xmlns:a16="http://schemas.microsoft.com/office/drawing/2014/main" id="{D962511F-0E4A-C00F-FD06-CCC1F97B4E4D}"/>
+                <a16:creationId xmlns:a16="http://schemas.microsoft.com/office/drawing/2014/main" id="{ABBB15FC-7699-EAEF-42E3-0447334AB7E0}"/>
               </a:ext>
             </a:extLst>
           </p:cNvPr>
@@ -2634,7 +2634,7 @@
           <a:bodyPr/>
           <a:lstStyle/>
           <a:p>
-            <a:fld id="{3DFE9996-2F43-4DB5-9595-BA3FF82450D1}" type="datetimeFigureOut">
+            <a:fld id="{66A81F38-642B-4C52-A102-F6078277B884}" type="datetimeFigureOut">
               <a:rPr kumimoji="1" lang="ja-JP" altLang="en-US" smtClean="0"/>
               <a:t>2026/7/30</a:t>
             </a:fld>
@@ -2647,7 +2647,7 @@
           <p:cNvPr id="6" name="フッター プレースホルダー 5">
             <a:extLst>
               <a:ext uri="{FF2B5EF4-FFF2-40B4-BE49-F238E27FC236}">
-                <a16:creationId xmlns:a16="http://schemas.microsoft.com/office/drawing/2014/main" id="{4BF3B6F0-1F4A-35A9-B5D0-15BD1EBB8BC6}"/>
+                <a16:creationId xmlns:a16="http://schemas.microsoft.com/office/drawing/2014/main" id="{C56E83D7-3F8E-1DBF-7487-E6452193E51C}"/>
               </a:ext>
             </a:extLst>
           </p:cNvPr>
@@ -2672,7 +2672,7 @@
           <p:cNvPr id="7" name="スライド番号プレースホルダー 6">
             <a:extLst>
               <a:ext uri="{FF2B5EF4-FFF2-40B4-BE49-F238E27FC236}">
-                <a16:creationId xmlns:a16="http://schemas.microsoft.com/office/drawing/2014/main" id="{A745621A-48B4-9292-2BC6-9AB8C98811EC}"/>
+                <a16:creationId xmlns:a16="http://schemas.microsoft.com/office/drawing/2014/main" id="{609F0AE5-C09E-22B5-4182-7FBDA0D4D052}"/>
               </a:ext>
             </a:extLst>
           </p:cNvPr>
@@ -2688,7 +2688,7 @@
           <a:bodyPr/>
           <a:lstStyle/>
           <a:p>
-            <a:fld id="{0B2EC772-2757-40B4-A5E9-D96527392856}" type="slidenum">
+            <a:fld id="{0A09F89C-9698-4AEB-AEA4-A8B3B450DEBE}" type="slidenum">
               <a:rPr kumimoji="1" lang="ja-JP" altLang="en-US" smtClean="0"/>
               <a:t>‹#›</a:t>
             </a:fld>
@@ -2699,7 +2699,7 @@
     </p:spTree>
     <p:extLst>
       <p:ext uri="{BB962C8B-B14F-4D97-AF65-F5344CB8AC3E}">
-        <p14:creationId xmlns:p14="http://schemas.microsoft.com/office/powerpoint/2010/main" val="3531064888"/>
+        <p14:creationId xmlns:p14="http://schemas.microsoft.com/office/powerpoint/2010/main" val="2418469701"/>
       </p:ext>
     </p:extLst>
   </p:cSld>
@@ -2731,7 +2731,7 @@
           <p:cNvPr id="2" name="タイトル 1">
             <a:extLst>
               <a:ext uri="{FF2B5EF4-FFF2-40B4-BE49-F238E27FC236}">
-                <a16:creationId xmlns:a16="http://schemas.microsoft.com/office/drawing/2014/main" id="{65D813BF-5A4A-9862-C58A-36DB01D09BC7}"/>
+                <a16:creationId xmlns:a16="http://schemas.microsoft.com/office/drawing/2014/main" id="{B3BF80A5-63A2-6D78-4CE4-129CC1FB58EB}"/>
               </a:ext>
             </a:extLst>
           </p:cNvPr>
@@ -2768,7 +2768,7 @@
           <p:cNvPr id="3" name="図プレースホルダー 2">
             <a:extLst>
               <a:ext uri="{FF2B5EF4-FFF2-40B4-BE49-F238E27FC236}">
-                <a16:creationId xmlns:a16="http://schemas.microsoft.com/office/drawing/2014/main" id="{BD24D275-6F16-9706-4053-75553922281E}"/>
+                <a16:creationId xmlns:a16="http://schemas.microsoft.com/office/drawing/2014/main" id="{EA585E1C-BF9E-C20C-DA88-147C0C53C759}"/>
               </a:ext>
             </a:extLst>
           </p:cNvPr>
@@ -2835,7 +2835,7 @@
           <p:cNvPr id="4" name="テキスト プレースホルダー 3">
             <a:extLst>
               <a:ext uri="{FF2B5EF4-FFF2-40B4-BE49-F238E27FC236}">
-                <a16:creationId xmlns:a16="http://schemas.microsoft.com/office/drawing/2014/main" id="{E0C522A2-00A9-64A9-EF43-F3CA15167DB8}"/>
+                <a16:creationId xmlns:a16="http://schemas.microsoft.com/office/drawing/2014/main" id="{D5ED4E58-2E63-D1BE-48AD-92952986685A}"/>
               </a:ext>
             </a:extLst>
           </p:cNvPr>
@@ -2906,7 +2906,7 @@
           <p:cNvPr id="5" name="日付プレースホルダー 4">
             <a:extLst>
               <a:ext uri="{FF2B5EF4-FFF2-40B4-BE49-F238E27FC236}">
-                <a16:creationId xmlns:a16="http://schemas.microsoft.com/office/drawing/2014/main" id="{3774064C-3F30-92F6-2BBE-39E570DAFF2A}"/>
+                <a16:creationId xmlns:a16="http://schemas.microsoft.com/office/drawing/2014/main" id="{DB50D4BD-BBF0-F25F-B59B-7AEF50CE355F}"/>
               </a:ext>
             </a:extLst>
           </p:cNvPr>
@@ -2922,7 +2922,7 @@
           <a:bodyPr/>
           <a:lstStyle/>
           <a:p>
-            <a:fld id="{3DFE9996-2F43-4DB5-9595-BA3FF82450D1}" type="datetimeFigureOut">
+            <a:fld id="{66A81F38-642B-4C52-A102-F6078277B884}" type="datetimeFigureOut">
               <a:rPr kumimoji="1" lang="ja-JP" altLang="en-US" smtClean="0"/>
               <a:t>2026/7/30</a:t>
             </a:fld>
@@ -2935,7 +2935,7 @@
           <p:cNvPr id="6" name="フッター プレースホルダー 5">
             <a:extLst>
               <a:ext uri="{FF2B5EF4-FFF2-40B4-BE49-F238E27FC236}">
-                <a16:creationId xmlns:a16="http://schemas.microsoft.com/office/drawing/2014/main" id="{FB260E20-35B5-1971-E71B-363266457A55}"/>
+                <a16:creationId xmlns:a16="http://schemas.microsoft.com/office/drawing/2014/main" id="{3D84E201-F098-C441-23E3-886E7EBC1662}"/>
               </a:ext>
             </a:extLst>
           </p:cNvPr>
@@ -2960,7 +2960,7 @@
           <p:cNvPr id="7" name="スライド番号プレースホルダー 6">
             <a:extLst>
               <a:ext uri="{FF2B5EF4-FFF2-40B4-BE49-F238E27FC236}">
-                <a16:creationId xmlns:a16="http://schemas.microsoft.com/office/drawing/2014/main" id="{8CA2FD8D-77DD-5B86-4646-98B2A026B288}"/>
+                <a16:creationId xmlns:a16="http://schemas.microsoft.com/office/drawing/2014/main" id="{71157C26-72AF-72E0-E917-7565A1924359}"/>
               </a:ext>
             </a:extLst>
           </p:cNvPr>
@@ -2976,7 +2976,7 @@
           <a:bodyPr/>
           <a:lstStyle/>
           <a:p>
-            <a:fld id="{0B2EC772-2757-40B4-A5E9-D96527392856}" type="slidenum">
+            <a:fld id="{0A09F89C-9698-4AEB-AEA4-A8B3B450DEBE}" type="slidenum">
               <a:rPr kumimoji="1" lang="ja-JP" altLang="en-US" smtClean="0"/>
               <a:t>‹#›</a:t>
             </a:fld>
@@ -2987,7 +2987,7 @@
     </p:spTree>
     <p:extLst>
       <p:ext uri="{BB962C8B-B14F-4D97-AF65-F5344CB8AC3E}">
-        <p14:creationId xmlns:p14="http://schemas.microsoft.com/office/powerpoint/2010/main" val="1315768683"/>
+        <p14:creationId xmlns:p14="http://schemas.microsoft.com/office/powerpoint/2010/main" val="1102749420"/>
       </p:ext>
     </p:extLst>
   </p:cSld>
@@ -3024,7 +3024,7 @@
           <p:cNvPr id="2" name="タイトル プレースホルダー 1">
             <a:extLst>
               <a:ext uri="{FF2B5EF4-FFF2-40B4-BE49-F238E27FC236}">
-                <a16:creationId xmlns:a16="http://schemas.microsoft.com/office/drawing/2014/main" id="{77DDB532-9FBE-6EDB-E4D1-604D6B5D97E7}"/>
+                <a16:creationId xmlns:a16="http://schemas.microsoft.com/office/drawing/2014/main" id="{2BDFD674-0A53-865D-B1EA-7CBBDA180564}"/>
               </a:ext>
             </a:extLst>
           </p:cNvPr>
@@ -3062,7 +3062,7 @@
           <p:cNvPr id="3" name="テキスト プレースホルダー 2">
             <a:extLst>
               <a:ext uri="{FF2B5EF4-FFF2-40B4-BE49-F238E27FC236}">
-                <a16:creationId xmlns:a16="http://schemas.microsoft.com/office/drawing/2014/main" id="{1CCC654A-9D4B-A76B-58B6-7A7B429CAA2E}"/>
+                <a16:creationId xmlns:a16="http://schemas.microsoft.com/office/drawing/2014/main" id="{CF13A0B1-3C08-FD03-1534-CE634B7247B9}"/>
               </a:ext>
             </a:extLst>
           </p:cNvPr>
@@ -3161,7 +3161,7 @@
           <p:cNvPr id="4" name="日付プレースホルダー 3">
             <a:extLst>
               <a:ext uri="{FF2B5EF4-FFF2-40B4-BE49-F238E27FC236}">
-                <a16:creationId xmlns:a16="http://schemas.microsoft.com/office/drawing/2014/main" id="{7DADDDB9-33BE-E628-0844-59E75752FCED}"/>
+                <a16:creationId xmlns:a16="http://schemas.microsoft.com/office/drawing/2014/main" id="{30C1F547-EED8-88EA-CBAA-0A81979AA204}"/>
               </a:ext>
             </a:extLst>
           </p:cNvPr>
@@ -3195,7 +3195,7 @@
             </a:lvl1pPr>
           </a:lstStyle>
           <a:p>
-            <a:fld id="{3DFE9996-2F43-4DB5-9595-BA3FF82450D1}" type="datetimeFigureOut">
+            <a:fld id="{66A81F38-642B-4C52-A102-F6078277B884}" type="datetimeFigureOut">
               <a:rPr kumimoji="1" lang="ja-JP" altLang="en-US" smtClean="0"/>
               <a:t>2026/7/30</a:t>
             </a:fld>
@@ -3208,7 +3208,7 @@
           <p:cNvPr id="5" name="フッター プレースホルダー 4">
             <a:extLst>
               <a:ext uri="{FF2B5EF4-FFF2-40B4-BE49-F238E27FC236}">
-                <a16:creationId xmlns:a16="http://schemas.microsoft.com/office/drawing/2014/main" id="{3BED55B8-AD68-20AC-B3B1-418F07D9B27A}"/>
+                <a16:creationId xmlns:a16="http://schemas.microsoft.com/office/drawing/2014/main" id="{0A614506-C645-5B2B-BBE6-03916272ED70}"/>
               </a:ext>
             </a:extLst>
           </p:cNvPr>
@@ -3251,7 +3251,7 @@
           <p:cNvPr id="6" name="スライド番号プレースホルダー 5">
             <a:extLst>
               <a:ext uri="{FF2B5EF4-FFF2-40B4-BE49-F238E27FC236}">
-                <a16:creationId xmlns:a16="http://schemas.microsoft.com/office/drawing/2014/main" id="{EE5C09CA-1D33-F587-7758-7E05771C2119}"/>
+                <a16:creationId xmlns:a16="http://schemas.microsoft.com/office/drawing/2014/main" id="{0563CF70-ADC9-EAA0-9A31-222BB4729D5B}"/>
               </a:ext>
             </a:extLst>
           </p:cNvPr>
@@ -3285,7 +3285,7 @@
             </a:lvl1pPr>
           </a:lstStyle>
           <a:p>
-            <a:fld id="{0B2EC772-2757-40B4-A5E9-D96527392856}" type="slidenum">
+            <a:fld id="{0A09F89C-9698-4AEB-AEA4-A8B3B450DEBE}" type="slidenum">
               <a:rPr kumimoji="1" lang="ja-JP" altLang="en-US" smtClean="0"/>
               <a:t>‹#›</a:t>
             </a:fld>
@@ -3296,7 +3296,7 @@
     </p:spTree>
     <p:extLst>
       <p:ext uri="{BB962C8B-B14F-4D97-AF65-F5344CB8AC3E}">
-        <p14:creationId xmlns:p14="http://schemas.microsoft.com/office/powerpoint/2010/main" val="619434133"/>
+        <p14:creationId xmlns:p14="http://schemas.microsoft.com/office/powerpoint/2010/main" val="2215252520"/>
       </p:ext>
     </p:extLst>
   </p:cSld>
@@ -3619,7 +3619,7 @@
           <p:cNvPr id="2" name="テキスト ボックス 1">
             <a:extLst>
               <a:ext uri="{FF2B5EF4-FFF2-40B4-BE49-F238E27FC236}">
-                <a16:creationId xmlns:a16="http://schemas.microsoft.com/office/drawing/2014/main" id="{57031A8D-D400-9B95-477B-4476D3ECADF7}"/>
+                <a16:creationId xmlns:a16="http://schemas.microsoft.com/office/drawing/2014/main" id="{F86383DF-2219-A4CE-CB8C-1C2D8AAD352E}"/>
               </a:ext>
             </a:extLst>
           </p:cNvPr>
@@ -3665,7 +3665,7 @@
           <p:cNvPr id="3" name="テキスト ボックス 2">
             <a:extLst>
               <a:ext uri="{FF2B5EF4-FFF2-40B4-BE49-F238E27FC236}">
-                <a16:creationId xmlns:a16="http://schemas.microsoft.com/office/drawing/2014/main" id="{FB3968DF-74C9-C869-D0F6-68590B4A0A73}"/>
+                <a16:creationId xmlns:a16="http://schemas.microsoft.com/office/drawing/2014/main" id="{48DE8818-54A9-1824-FDCF-0DA88700549D}"/>
               </a:ext>
             </a:extLst>
           </p:cNvPr>
@@ -3714,7 +3714,7 @@
           <p:cNvPr id="4" name="テキスト ボックス 3">
             <a:extLst>
               <a:ext uri="{FF2B5EF4-FFF2-40B4-BE49-F238E27FC236}">
-                <a16:creationId xmlns:a16="http://schemas.microsoft.com/office/drawing/2014/main" id="{068FECEB-F424-CB88-DEDF-E02C49843810}"/>
+                <a16:creationId xmlns:a16="http://schemas.microsoft.com/office/drawing/2014/main" id="{15AC16BB-F57D-1243-41CB-E2DE9856F605}"/>
               </a:ext>
             </a:extLst>
           </p:cNvPr>
@@ -3754,7 +3754,7 @@
           <p:cNvPr id="5" name="テキスト ボックス 4">
             <a:extLst>
               <a:ext uri="{FF2B5EF4-FFF2-40B4-BE49-F238E27FC236}">
-                <a16:creationId xmlns:a16="http://schemas.microsoft.com/office/drawing/2014/main" id="{0663F9F2-5D9C-9A5B-5F51-AA80782C23C5}"/>
+                <a16:creationId xmlns:a16="http://schemas.microsoft.com/office/drawing/2014/main" id="{B4C6756C-4757-9494-8917-F8E60D646665}"/>
               </a:ext>
             </a:extLst>
           </p:cNvPr>
@@ -3801,7 +3801,7 @@
             <a:hlinkClick r:id="" action="ppaction://media"/>
             <a:extLst>
               <a:ext uri="{FF2B5EF4-FFF2-40B4-BE49-F238E27FC236}">
-                <a16:creationId xmlns:a16="http://schemas.microsoft.com/office/drawing/2014/main" id="{1F886095-F456-91F1-0989-2CDC339E71A8}"/>
+                <a16:creationId xmlns:a16="http://schemas.microsoft.com/office/drawing/2014/main" id="{756B6796-2099-FF4C-F292-4E568E8F2801}"/>
               </a:ext>
             </a:extLst>
           </p:cNvPr>
@@ -3836,7 +3836,7 @@
     </p:spTree>
     <p:extLst>
       <p:ext uri="{BB962C8B-B14F-4D97-AF65-F5344CB8AC3E}">
-        <p14:creationId xmlns:p14="http://schemas.microsoft.com/office/powerpoint/2010/main" val="4133427409"/>
+        <p14:creationId xmlns:p14="http://schemas.microsoft.com/office/powerpoint/2010/main" val="169890687"/>
       </p:ext>
     </p:extLst>
   </p:cSld>
@@ -3960,7 +3960,7 @@
           <p:cNvPr id="2" name="テキスト ボックス 1">
             <a:extLst>
               <a:ext uri="{FF2B5EF4-FFF2-40B4-BE49-F238E27FC236}">
-                <a16:creationId xmlns:a16="http://schemas.microsoft.com/office/drawing/2014/main" id="{ABF43F3F-9E13-8282-D0BD-240D19A4CEEE}"/>
+                <a16:creationId xmlns:a16="http://schemas.microsoft.com/office/drawing/2014/main" id="{1632AE47-5FCC-143B-5129-0FE9AC821E2B}"/>
               </a:ext>
             </a:extLst>
           </p:cNvPr>
@@ -4006,7 +4006,7 @@
           <p:cNvPr id="3" name="テキスト ボックス 2">
             <a:extLst>
               <a:ext uri="{FF2B5EF4-FFF2-40B4-BE49-F238E27FC236}">
-                <a16:creationId xmlns:a16="http://schemas.microsoft.com/office/drawing/2014/main" id="{6310E438-58CB-F77C-AE6E-2237D832B546}"/>
+                <a16:creationId xmlns:a16="http://schemas.microsoft.com/office/drawing/2014/main" id="{6045A64F-1C36-7D24-97E6-28524841F291}"/>
               </a:ext>
             </a:extLst>
           </p:cNvPr>
@@ -4046,7 +4046,7 @@
           <p:cNvPr id="4" name="テキスト ボックス 3">
             <a:extLst>
               <a:ext uri="{FF2B5EF4-FFF2-40B4-BE49-F238E27FC236}">
-                <a16:creationId xmlns:a16="http://schemas.microsoft.com/office/drawing/2014/main" id="{A1F511C1-C4C2-9EAA-A791-AC53114C5CDA}"/>
+                <a16:creationId xmlns:a16="http://schemas.microsoft.com/office/drawing/2014/main" id="{F1C3C91B-2845-C6FB-547B-D9E77355CC89}"/>
               </a:ext>
             </a:extLst>
           </p:cNvPr>
@@ -4076,14 +4076,17 @@
                 </a:solidFill>
                 <a:latin typeface="Arial" panose="020B0604020202020204" pitchFamily="34" charset="0"/>
               </a:rPr>
-              <a:t>About Laravel Laravel is a web application framework with expressive, elegant syntax</a:t>
-            </a:r>
-            <a:endParaRPr kumimoji="1" lang="ja-JP" altLang="en-US" sz="2000">
-              <a:solidFill>
-                <a:srgbClr val="333333"/>
-              </a:solidFill>
-              <a:latin typeface="Arial" panose="020B0604020202020204" pitchFamily="34" charset="0"/>
-            </a:endParaRPr>
+              <a:t>Smoking Area Where</a:t>
+            </a:r>
+            <a:r>
+              <a:rPr kumimoji="1" lang="ja-JP" altLang="en-US" sz="2000">
+                <a:solidFill>
+                  <a:srgbClr val="333333"/>
+                </a:solidFill>
+                <a:latin typeface="Arial" panose="020B0604020202020204" pitchFamily="34" charset="0"/>
+              </a:rPr>
+              <a:t>の目的、構成、実装を公開コードから確認できるプロジェクトです。</a:t>
+            </a:r>
           </a:p>
         </p:txBody>
       </p:sp>
@@ -4092,7 +4095,7 @@
           <p:cNvPr id="5" name="テキスト ボックス 4">
             <a:extLst>
               <a:ext uri="{FF2B5EF4-FFF2-40B4-BE49-F238E27FC236}">
-                <a16:creationId xmlns:a16="http://schemas.microsoft.com/office/drawing/2014/main" id="{C7670B23-7D52-CB53-30A2-5DE4492056AC}"/>
+                <a16:creationId xmlns:a16="http://schemas.microsoft.com/office/drawing/2014/main" id="{1722BFAA-0ADA-151D-8FDB-FB55F7279193}"/>
               </a:ext>
             </a:extLst>
           </p:cNvPr>
@@ -4139,7 +4142,7 @@
             <a:hlinkClick r:id="" action="ppaction://media"/>
             <a:extLst>
               <a:ext uri="{FF2B5EF4-FFF2-40B4-BE49-F238E27FC236}">
-                <a16:creationId xmlns:a16="http://schemas.microsoft.com/office/drawing/2014/main" id="{67EBBC5A-F4F8-FDFD-1A84-58F7B22A512F}"/>
+                <a16:creationId xmlns:a16="http://schemas.microsoft.com/office/drawing/2014/main" id="{6B218CEE-F618-5F5A-B2FA-23121344C44A}"/>
               </a:ext>
             </a:extLst>
           </p:cNvPr>
@@ -4174,7 +4177,7 @@
     </p:spTree>
     <p:extLst>
       <p:ext uri="{BB962C8B-B14F-4D97-AF65-F5344CB8AC3E}">
-        <p14:creationId xmlns:p14="http://schemas.microsoft.com/office/powerpoint/2010/main" val="3189348757"/>
+        <p14:creationId xmlns:p14="http://schemas.microsoft.com/office/powerpoint/2010/main" val="3267307839"/>
       </p:ext>
     </p:extLst>
   </p:cSld>
@@ -4217,7 +4220,7 @@
                                   <p:childTnLst>
                                     <p:cmd type="call" cmd="playFrom(0.0)">
                                       <p:cBhvr>
-                                        <p:cTn id="6" dur="7780" fill="hold"/>
+                                        <p:cTn id="6" dur="7666" fill="hold"/>
                                         <p:tgtEl>
                                           <p:spTgt spid="6"/>
                                         </p:tgtEl>
@@ -4298,7 +4301,7 @@
           <p:cNvPr id="2" name="テキスト ボックス 1">
             <a:extLst>
               <a:ext uri="{FF2B5EF4-FFF2-40B4-BE49-F238E27FC236}">
-                <a16:creationId xmlns:a16="http://schemas.microsoft.com/office/drawing/2014/main" id="{85D636D4-CEC2-88AD-1B58-9F75B1CC7C3D}"/>
+                <a16:creationId xmlns:a16="http://schemas.microsoft.com/office/drawing/2014/main" id="{E4EE82E5-72C0-9629-7307-C6C067FC6D5E}"/>
               </a:ext>
             </a:extLst>
           </p:cNvPr>
@@ -4344,7 +4347,7 @@
           <p:cNvPr id="3" name="テキスト ボックス 2">
             <a:extLst>
               <a:ext uri="{FF2B5EF4-FFF2-40B4-BE49-F238E27FC236}">
-                <a16:creationId xmlns:a16="http://schemas.microsoft.com/office/drawing/2014/main" id="{60868081-052E-CD3D-93F8-AD8437537B4B}"/>
+                <a16:creationId xmlns:a16="http://schemas.microsoft.com/office/drawing/2014/main" id="{46EF34CF-53C8-E792-187B-09A77381088D}"/>
               </a:ext>
             </a:extLst>
           </p:cNvPr>
@@ -4384,7 +4387,7 @@
           <p:cNvPr id="4" name="テキスト ボックス 3">
             <a:extLst>
               <a:ext uri="{FF2B5EF4-FFF2-40B4-BE49-F238E27FC236}">
-                <a16:creationId xmlns:a16="http://schemas.microsoft.com/office/drawing/2014/main" id="{CC912795-FB26-CB8E-C4DD-FD5CF8C07531}"/>
+                <a16:creationId xmlns:a16="http://schemas.microsoft.com/office/drawing/2014/main" id="{1614CC3D-B6A4-A8CB-7F2E-60E5C466AF7A}"/>
               </a:ext>
             </a:extLst>
           </p:cNvPr>
@@ -4515,7 +4518,7 @@
           <p:cNvPr id="5" name="テキスト ボックス 4">
             <a:extLst>
               <a:ext uri="{FF2B5EF4-FFF2-40B4-BE49-F238E27FC236}">
-                <a16:creationId xmlns:a16="http://schemas.microsoft.com/office/drawing/2014/main" id="{72B7065C-8618-FDD9-1EA9-E229A8B23E56}"/>
+                <a16:creationId xmlns:a16="http://schemas.microsoft.com/office/drawing/2014/main" id="{91D351A0-FE93-49AD-A2E8-8A3353AFF71E}"/>
               </a:ext>
             </a:extLst>
           </p:cNvPr>
@@ -4562,7 +4565,7 @@
             <a:hlinkClick r:id="" action="ppaction://media"/>
             <a:extLst>
               <a:ext uri="{FF2B5EF4-FFF2-40B4-BE49-F238E27FC236}">
-                <a16:creationId xmlns:a16="http://schemas.microsoft.com/office/drawing/2014/main" id="{6B843A5C-F447-5017-9659-4AFABDC1506D}"/>
+                <a16:creationId xmlns:a16="http://schemas.microsoft.com/office/drawing/2014/main" id="{7D147542-10B0-62FA-6F5E-343B50C868E5}"/>
               </a:ext>
             </a:extLst>
           </p:cNvPr>
@@ -4597,7 +4600,7 @@
     </p:spTree>
     <p:extLst>
       <p:ext uri="{BB962C8B-B14F-4D97-AF65-F5344CB8AC3E}">
-        <p14:creationId xmlns:p14="http://schemas.microsoft.com/office/powerpoint/2010/main" val="1542512519"/>
+        <p14:creationId xmlns:p14="http://schemas.microsoft.com/office/powerpoint/2010/main" val="1638201628"/>
       </p:ext>
     </p:extLst>
   </p:cSld>
@@ -4721,7 +4724,7 @@
           <p:cNvPr id="2" name="テキスト ボックス 1">
             <a:extLst>
               <a:ext uri="{FF2B5EF4-FFF2-40B4-BE49-F238E27FC236}">
-                <a16:creationId xmlns:a16="http://schemas.microsoft.com/office/drawing/2014/main" id="{6E5303B3-1BB5-36E6-4FB7-B952E8CCACB9}"/>
+                <a16:creationId xmlns:a16="http://schemas.microsoft.com/office/drawing/2014/main" id="{51D86699-C8A2-3124-AE50-F5D6D6740D83}"/>
               </a:ext>
             </a:extLst>
           </p:cNvPr>
@@ -4767,7 +4770,7 @@
           <p:cNvPr id="3" name="テキスト ボックス 2">
             <a:extLst>
               <a:ext uri="{FF2B5EF4-FFF2-40B4-BE49-F238E27FC236}">
-                <a16:creationId xmlns:a16="http://schemas.microsoft.com/office/drawing/2014/main" id="{A6F1C1B2-EF28-9C65-3C33-54D789C5A7AF}"/>
+                <a16:creationId xmlns:a16="http://schemas.microsoft.com/office/drawing/2014/main" id="{C52C490B-C427-1BDD-1A19-476E72BE9D00}"/>
               </a:ext>
             </a:extLst>
           </p:cNvPr>
@@ -4807,7 +4810,7 @@
           <p:cNvPr id="4" name="テキスト ボックス 3">
             <a:extLst>
               <a:ext uri="{FF2B5EF4-FFF2-40B4-BE49-F238E27FC236}">
-                <a16:creationId xmlns:a16="http://schemas.microsoft.com/office/drawing/2014/main" id="{6C9C9804-F209-BBF8-88CB-E18A040D63CD}"/>
+                <a16:creationId xmlns:a16="http://schemas.microsoft.com/office/drawing/2014/main" id="{AD6187DC-8B64-4D5B-66E1-6E3F673FEC88}"/>
               </a:ext>
             </a:extLst>
           </p:cNvPr>
@@ -4917,7 +4920,7 @@
           <p:cNvPr id="5" name="テキスト ボックス 4">
             <a:extLst>
               <a:ext uri="{FF2B5EF4-FFF2-40B4-BE49-F238E27FC236}">
-                <a16:creationId xmlns:a16="http://schemas.microsoft.com/office/drawing/2014/main" id="{44A32A29-06EE-BDF7-9AEB-7DEA6EDDA275}"/>
+                <a16:creationId xmlns:a16="http://schemas.microsoft.com/office/drawing/2014/main" id="{546F1FA1-5135-106D-6A66-FCA2B52555B2}"/>
               </a:ext>
             </a:extLst>
           </p:cNvPr>
@@ -4964,7 +4967,7 @@
             <a:hlinkClick r:id="" action="ppaction://media"/>
             <a:extLst>
               <a:ext uri="{FF2B5EF4-FFF2-40B4-BE49-F238E27FC236}">
-                <a16:creationId xmlns:a16="http://schemas.microsoft.com/office/drawing/2014/main" id="{643B28C7-70FD-2DC1-CC97-32F9079116AE}"/>
+                <a16:creationId xmlns:a16="http://schemas.microsoft.com/office/drawing/2014/main" id="{4D70DFA8-F402-5A97-601F-C2162FD2A161}"/>
               </a:ext>
             </a:extLst>
           </p:cNvPr>
@@ -4999,7 +5002,7 @@
     </p:spTree>
     <p:extLst>
       <p:ext uri="{BB962C8B-B14F-4D97-AF65-F5344CB8AC3E}">
-        <p14:creationId xmlns:p14="http://schemas.microsoft.com/office/powerpoint/2010/main" val="844103281"/>
+        <p14:creationId xmlns:p14="http://schemas.microsoft.com/office/powerpoint/2010/main" val="1469995460"/>
       </p:ext>
     </p:extLst>
   </p:cSld>
@@ -5123,7 +5126,7 @@
           <p:cNvPr id="2" name="テキスト ボックス 1">
             <a:extLst>
               <a:ext uri="{FF2B5EF4-FFF2-40B4-BE49-F238E27FC236}">
-                <a16:creationId xmlns:a16="http://schemas.microsoft.com/office/drawing/2014/main" id="{0ACA845F-8B41-4187-5C7C-4CEEB5FC901E}"/>
+                <a16:creationId xmlns:a16="http://schemas.microsoft.com/office/drawing/2014/main" id="{23A8EC16-EF7A-F220-B1C9-7D22025315A5}"/>
               </a:ext>
             </a:extLst>
           </p:cNvPr>
@@ -5169,7 +5172,7 @@
           <p:cNvPr id="3" name="テキスト ボックス 2">
             <a:extLst>
               <a:ext uri="{FF2B5EF4-FFF2-40B4-BE49-F238E27FC236}">
-                <a16:creationId xmlns:a16="http://schemas.microsoft.com/office/drawing/2014/main" id="{89ED6A3D-7B97-F846-4684-42255D64A37E}"/>
+                <a16:creationId xmlns:a16="http://schemas.microsoft.com/office/drawing/2014/main" id="{AE052AF8-9FB6-98DF-DDCA-473055C46173}"/>
               </a:ext>
             </a:extLst>
           </p:cNvPr>
@@ -5209,7 +5212,7 @@
           <p:cNvPr id="4" name="テキスト ボックス 3">
             <a:extLst>
               <a:ext uri="{FF2B5EF4-FFF2-40B4-BE49-F238E27FC236}">
-                <a16:creationId xmlns:a16="http://schemas.microsoft.com/office/drawing/2014/main" id="{ECB3141E-D4BA-72D9-6D5F-72F2BC793664}"/>
+                <a16:creationId xmlns:a16="http://schemas.microsoft.com/office/drawing/2014/main" id="{D7060031-A356-5A99-1240-77E656D5DF3E}"/>
               </a:ext>
             </a:extLst>
           </p:cNvPr>
@@ -5233,56 +5236,14 @@
           <a:lstStyle/>
           <a:p>
             <a:r>
-              <a:rPr kumimoji="1" lang="en-US" altLang="ja-JP" sz="2000">
-                <a:solidFill>
-                  <a:srgbClr val="333333"/>
-                </a:solidFill>
-                <a:latin typeface="Arial" panose="020B0604020202020204" pitchFamily="34" charset="0"/>
-              </a:rPr>
-              <a:t>LINE</a:t>
-            </a:r>
-            <a:r>
               <a:rPr kumimoji="1" lang="ja-JP" altLang="en-US" sz="2000">
                 <a:solidFill>
                   <a:srgbClr val="333333"/>
                 </a:solidFill>
                 <a:latin typeface="Arial" panose="020B0604020202020204" pitchFamily="34" charset="0"/>
               </a:rPr>
-              <a:t>プッシュ通知連携を追加</a:t>
-            </a:r>
-            <a:r>
-              <a:rPr kumimoji="1" lang="en-US" altLang="ja-JP" sz="2000">
-                <a:solidFill>
-                  <a:srgbClr val="333333"/>
-                </a:solidFill>
-                <a:latin typeface="Arial" panose="020B0604020202020204" pitchFamily="34" charset="0"/>
-              </a:rPr>
-              <a:t>(</a:t>
-            </a:r>
-            <a:r>
-              <a:rPr kumimoji="1" lang="ja-JP" altLang="en-US" sz="2000">
-                <a:solidFill>
-                  <a:srgbClr val="333333"/>
-                </a:solidFill>
-                <a:latin typeface="Arial" panose="020B0604020202020204" pitchFamily="34" charset="0"/>
-              </a:rPr>
-              <a:t>お気に入りスポットの混雑度変化</a:t>
-            </a:r>
-            <a:r>
-              <a:rPr kumimoji="1" lang="en-US" altLang="ja-JP" sz="2000">
-                <a:solidFill>
-                  <a:srgbClr val="333333"/>
-                </a:solidFill>
-                <a:latin typeface="Arial" panose="020B0604020202020204" pitchFamily="34" charset="0"/>
-              </a:rPr>
-              <a:t>)</a:t>
-            </a:r>
-            <a:endParaRPr kumimoji="1" lang="ja-JP" altLang="en-US" sz="2000">
-              <a:solidFill>
-                <a:srgbClr val="333333"/>
-              </a:solidFill>
-              <a:latin typeface="Arial" panose="020B0604020202020204" pitchFamily="34" charset="0"/>
-            </a:endParaRPr>
+              <a:t>直近のコミットでは、実装の見直しと継続的な改善が行われました。</a:t>
+            </a:r>
           </a:p>
         </p:txBody>
       </p:sp>
@@ -5291,7 +5252,7 @@
           <p:cNvPr id="5" name="テキスト ボックス 4">
             <a:extLst>
               <a:ext uri="{FF2B5EF4-FFF2-40B4-BE49-F238E27FC236}">
-                <a16:creationId xmlns:a16="http://schemas.microsoft.com/office/drawing/2014/main" id="{015A57B7-9AB0-DB9C-2987-9CBE3C798EF4}"/>
+                <a16:creationId xmlns:a16="http://schemas.microsoft.com/office/drawing/2014/main" id="{CC0E052A-94FD-6828-DA49-33C61378A271}"/>
               </a:ext>
             </a:extLst>
           </p:cNvPr>
@@ -5338,7 +5299,7 @@
             <a:hlinkClick r:id="" action="ppaction://media"/>
             <a:extLst>
               <a:ext uri="{FF2B5EF4-FFF2-40B4-BE49-F238E27FC236}">
-                <a16:creationId xmlns:a16="http://schemas.microsoft.com/office/drawing/2014/main" id="{23B35420-110D-4CB7-9771-198C02150019}"/>
+                <a16:creationId xmlns:a16="http://schemas.microsoft.com/office/drawing/2014/main" id="{D197DD1A-1FB0-7B8D-77B3-335DBA816EBA}"/>
               </a:ext>
             </a:extLst>
           </p:cNvPr>
@@ -5373,7 +5334,7 @@
     </p:spTree>
     <p:extLst>
       <p:ext uri="{BB962C8B-B14F-4D97-AF65-F5344CB8AC3E}">
-        <p14:creationId xmlns:p14="http://schemas.microsoft.com/office/powerpoint/2010/main" val="2139122913"/>
+        <p14:creationId xmlns:p14="http://schemas.microsoft.com/office/powerpoint/2010/main" val="1186272996"/>
       </p:ext>
     </p:extLst>
   </p:cSld>
@@ -5382,10 +5343,10 @@
   </p:clrMapOvr>
   <mc:AlternateContent xmlns:mc="http://schemas.openxmlformats.org/markup-compatibility/2006">
     <mc:Choice xmlns:p14="http://schemas.microsoft.com/office/powerpoint/2010/main" Requires="p14">
-      <p:transition spd="slow" p14:dur="2000" advTm="10000"/>
+      <p:transition spd="slow" p14:dur="2000" advTm="7000"/>
     </mc:Choice>
     <mc:Fallback>
-      <p:transition spd="slow" advTm="10000"/>
+      <p:transition spd="slow" advTm="7000"/>
     </mc:Fallback>
   </mc:AlternateContent>
   <p:timing>
@@ -5416,7 +5377,7 @@
                                   <p:childTnLst>
                                     <p:cmd type="call" cmd="playFrom(0.0)">
                                       <p:cBhvr>
-                                        <p:cTn id="6" dur="9460" fill="hold"/>
+                                        <p:cTn id="6" dur="6076" fill="hold"/>
                                         <p:tgtEl>
                                           <p:spTgt spid="6"/>
                                         </p:tgtEl>
@@ -5497,7 +5458,7 @@
           <p:cNvPr id="2" name="テキスト ボックス 1">
             <a:extLst>
               <a:ext uri="{FF2B5EF4-FFF2-40B4-BE49-F238E27FC236}">
-                <a16:creationId xmlns:a16="http://schemas.microsoft.com/office/drawing/2014/main" id="{0320F3FC-5231-DD08-B309-E6B85B6AEEE2}"/>
+                <a16:creationId xmlns:a16="http://schemas.microsoft.com/office/drawing/2014/main" id="{1CED71D1-E98E-292B-02E8-83C9093486B1}"/>
               </a:ext>
             </a:extLst>
           </p:cNvPr>
@@ -5543,7 +5504,7 @@
           <p:cNvPr id="3" name="テキスト ボックス 2">
             <a:extLst>
               <a:ext uri="{FF2B5EF4-FFF2-40B4-BE49-F238E27FC236}">
-                <a16:creationId xmlns:a16="http://schemas.microsoft.com/office/drawing/2014/main" id="{CCA55B25-93FD-285C-C838-32114A58CBF9}"/>
+                <a16:creationId xmlns:a16="http://schemas.microsoft.com/office/drawing/2014/main" id="{19B7FD38-83E7-F4E9-F568-F65D9A501DE1}"/>
               </a:ext>
             </a:extLst>
           </p:cNvPr>
@@ -5583,7 +5544,7 @@
           <p:cNvPr id="4" name="テキスト ボックス 3">
             <a:extLst>
               <a:ext uri="{FF2B5EF4-FFF2-40B4-BE49-F238E27FC236}">
-                <a16:creationId xmlns:a16="http://schemas.microsoft.com/office/drawing/2014/main" id="{9F85F4E6-1F6C-0D8C-FF66-689383E35BF0}"/>
+                <a16:creationId xmlns:a16="http://schemas.microsoft.com/office/drawing/2014/main" id="{951B31D5-486B-90DF-7631-56BB847398D4}"/>
               </a:ext>
             </a:extLst>
           </p:cNvPr>
@@ -5648,7 +5609,7 @@
           <p:cNvPr id="5" name="テキスト ボックス 4">
             <a:extLst>
               <a:ext uri="{FF2B5EF4-FFF2-40B4-BE49-F238E27FC236}">
-                <a16:creationId xmlns:a16="http://schemas.microsoft.com/office/drawing/2014/main" id="{01292046-EE19-834E-6264-2704D72F9118}"/>
+                <a16:creationId xmlns:a16="http://schemas.microsoft.com/office/drawing/2014/main" id="{BC1004F4-B4D2-65EE-B53D-98E8E3277ABC}"/>
               </a:ext>
             </a:extLst>
           </p:cNvPr>
@@ -5695,7 +5656,7 @@
             <a:hlinkClick r:id="" action="ppaction://media"/>
             <a:extLst>
               <a:ext uri="{FF2B5EF4-FFF2-40B4-BE49-F238E27FC236}">
-                <a16:creationId xmlns:a16="http://schemas.microsoft.com/office/drawing/2014/main" id="{7F3D91F1-2BB7-29A5-22BC-C8A352543FBB}"/>
+                <a16:creationId xmlns:a16="http://schemas.microsoft.com/office/drawing/2014/main" id="{89126B05-020C-5778-D329-D85A6F80C1CC}"/>
               </a:ext>
             </a:extLst>
           </p:cNvPr>
@@ -5730,7 +5691,7 @@
     </p:spTree>
     <p:extLst>
       <p:ext uri="{BB962C8B-B14F-4D97-AF65-F5344CB8AC3E}">
-        <p14:creationId xmlns:p14="http://schemas.microsoft.com/office/powerpoint/2010/main" val="3165538040"/>
+        <p14:creationId xmlns:p14="http://schemas.microsoft.com/office/powerpoint/2010/main" val="220032035"/>
       </p:ext>
     </p:extLst>
   </p:cSld>
